--- a/morning-registration-activities/form-time-quiz/downloads/Form_Time_Quiz_Sixth_Form.pptx
+++ b/morning-registration-activities/form-time-quiz/downloads/Form_Time_Quiz_Sixth_Form.pptx
@@ -7461,7 +7461,7 @@
                 </a:solidFill>
                 <a:latin typeface="Karla"/>
               </a:rPr>
-              <a:t>Gross is the full amount before tax and anything else is taken off. What actually lands in your account is net pay, and it is always less.</a:t>
+              <a:t>Gross is the full amount before tax and anything else is taken off. What actually lands in your account is net pay, and it is usually less.</a:t>
             </a:r>
           </a:p>
         </p:txBody>

--- a/morning-registration-activities/form-time-quiz/downloads/Form_Time_Quiz_Sixth_Form.pptx
+++ b/morning-registration-activities/form-time-quiz/downloads/Form_Time_Quiz_Sixth_Form.pptx
@@ -12028,7 +12028,7 @@
                 </a:solidFill>
                 <a:latin typeface="Karla"/>
               </a:rPr>
-              <a:t>Volume Two is coming soon to thepastoralguide.com.</a:t>
+              <a:t>Volume Two is available now at thepastoralguide.com.</a:t>
             </a:r>
           </a:p>
         </p:txBody>

--- a/morning-registration-activities/form-time-quiz/downloads/Form_Time_Quiz_Sixth_Form.pptx
+++ b/morning-registration-activities/form-time-quiz/downloads/Form_Time_Quiz_Sixth_Form.pptx
@@ -3193,7 +3193,7 @@
                 <a:solidFill>
                   <a:srgbClr val="974F16"/>
                 </a:solidFill>
-                <a:latin typeface="Karla"/>
+                <a:latin typeface="Calibri"/>
               </a:rPr>
               <a:t>MORNING REGISTRATION ACTIVITIES</a:t>
             </a:r>
@@ -3231,11 +3231,11 @@
               </a:spcAft>
             </a:pPr>
             <a:r>
-              <a:rPr sz="3000" b="1" i="0">
+              <a:rPr sz="3000" b="0" i="0">
                 <a:solidFill>
                   <a:srgbClr val="974F16"/>
                 </a:solidFill>
-                <a:latin typeface="Libre Caslon Display"/>
+                <a:latin typeface="Georgia"/>
               </a:rPr>
               <a:t>The Form Time Quiz</a:t>
             </a:r>
@@ -3290,7 +3290,7 @@
                 <a:solidFill>
                   <a:srgbClr val="FFFDF7"/>
                 </a:solidFill>
-                <a:latin typeface="Karla"/>
+                <a:latin typeface="Calibri"/>
               </a:rPr>
               <a:t>VOLUME ONE  ·  SIXTH FORM</a:t>
             </a:r>
@@ -3332,7 +3332,7 @@
                 <a:solidFill>
                   <a:srgbClr val="5C6552"/>
                 </a:solidFill>
-                <a:latin typeface="Karla"/>
+                <a:latin typeface="Calibri"/>
               </a:rPr>
               <a:t>Ten questions: six on adult life admin, then four of general knowledge.</a:t>
             </a:r>
@@ -3482,11 +3482,11 @@
               </a:spcAft>
             </a:pPr>
             <a:r>
-              <a:rPr sz="1350" b="1" i="0">
+              <a:rPr sz="1350" b="0" i="0">
                 <a:solidFill>
                   <a:srgbClr val="974F16"/>
                 </a:solidFill>
-                <a:latin typeface="Libre Caslon Display"/>
+                <a:latin typeface="Georgia"/>
               </a:rPr>
               <a:t>Get into teams</a:t>
             </a:r>
@@ -3528,7 +3528,7 @@
                 <a:solidFill>
                   <a:srgbClr val="5C6552"/>
                 </a:solidFill>
-                <a:latin typeface="Karla"/>
+                <a:latin typeface="Calibri"/>
               </a:rPr>
               <a:t>Three or four to a team, with one answer sheet between you.</a:t>
             </a:r>
@@ -3678,11 +3678,11 @@
               </a:spcAft>
             </a:pPr>
             <a:r>
-              <a:rPr sz="1350" b="1" i="0">
+              <a:rPr sz="1350" b="0" i="0">
                 <a:solidFill>
                   <a:srgbClr val="974F16"/>
                 </a:solidFill>
-                <a:latin typeface="Libre Caslon Display"/>
+                <a:latin typeface="Georgia"/>
               </a:rPr>
               <a:t>Answer together</a:t>
             </a:r>
@@ -3724,7 +3724,7 @@
                 <a:solidFill>
                   <a:srgbClr val="5C6552"/>
                 </a:solidFill>
-                <a:latin typeface="Karla"/>
+                <a:latin typeface="Calibri"/>
               </a:rPr>
               <a:t>Each question goes up on the board. Agree an answer, then write it down.</a:t>
             </a:r>
@@ -3874,11 +3874,11 @@
               </a:spcAft>
             </a:pPr>
             <a:r>
-              <a:rPr sz="1350" b="1" i="0">
+              <a:rPr sz="1350" b="0" i="0">
                 <a:solidFill>
                   <a:srgbClr val="974F16"/>
                 </a:solidFill>
-                <a:latin typeface="Libre Caslon Display"/>
+                <a:latin typeface="Georgia"/>
               </a:rPr>
               <a:t>Swap and mark</a:t>
             </a:r>
@@ -3920,7 +3920,7 @@
                 <a:solidFill>
                   <a:srgbClr val="5C6552"/>
                 </a:solidFill>
-                <a:latin typeface="Karla"/>
+                <a:latin typeface="Calibri"/>
               </a:rPr>
               <a:t>Swap sheets with the team next to you, then the answers go up one at a time.</a:t>
             </a:r>
@@ -3962,7 +3962,7 @@
                 <a:solidFill>
                   <a:srgbClr val="8B9179"/>
                 </a:solidFill>
-                <a:latin typeface="Karla"/>
+                <a:latin typeface="Calibri"/>
               </a:rPr>
               <a:t>Needs: one answer sheet per team, from the resource pack.</a:t>
             </a:r>
@@ -4028,7 +4028,7 @@
                 <a:solidFill>
                   <a:srgbClr val="8B9179"/>
                 </a:solidFill>
-                <a:latin typeface="Karla"/>
+                <a:latin typeface="Calibri"/>
               </a:rPr>
               <a:t>The Pastoral Guide</a:t>
             </a:r>
@@ -4070,7 +4070,7 @@
                 <a:solidFill>
                   <a:srgbClr val="8B9179"/>
                 </a:solidFill>
-                <a:latin typeface="Karla"/>
+                <a:latin typeface="Calibri"/>
               </a:rPr>
               <a:t>1 / 27</a:t>
             </a:r>
@@ -4174,7 +4174,7 @@
                 <a:solidFill>
                   <a:srgbClr val="974F16"/>
                 </a:solidFill>
-                <a:latin typeface="Karla"/>
+                <a:latin typeface="Calibri"/>
               </a:rPr>
               <a:t>THE FORM TIME QUIZ  ·  ROUND TWO  ·  QUESTION 7 OF 10</a:t>
             </a:r>
@@ -4350,7 +4350,7 @@
                 <a:solidFill>
                   <a:srgbClr val="FFFDF7"/>
                 </a:solidFill>
-                <a:latin typeface="Karla"/>
+                <a:latin typeface="Calibri"/>
               </a:rPr>
               <a:t>7</a:t>
             </a:r>
@@ -4388,11 +4388,11 @@
               </a:spcAft>
             </a:pPr>
             <a:r>
-              <a:rPr sz="2400" b="1" i="0">
+              <a:rPr sz="2400" b="0" i="0">
                 <a:solidFill>
                   <a:srgbClr val="974F16"/>
                 </a:solidFill>
-                <a:latin typeface="Libre Caslon Display"/>
+                <a:latin typeface="Georgia"/>
               </a:rPr>
               <a:t>What is the capital city of Australia?</a:t>
             </a:r>
@@ -4478,7 +4478,7 @@
                 <a:solidFill>
                   <a:srgbClr val="8B9179"/>
                 </a:solidFill>
-                <a:latin typeface="Karla"/>
+                <a:latin typeface="Calibri"/>
               </a:rPr>
               <a:t>Agree it as a team, then write it on the sheet.</a:t>
             </a:r>
@@ -4544,7 +4544,7 @@
                 <a:solidFill>
                   <a:srgbClr val="8B9179"/>
                 </a:solidFill>
-                <a:latin typeface="Karla"/>
+                <a:latin typeface="Calibri"/>
               </a:rPr>
               <a:t>The Pastoral Guide</a:t>
             </a:r>
@@ -4586,7 +4586,7 @@
                 <a:solidFill>
                   <a:srgbClr val="8B9179"/>
                 </a:solidFill>
-                <a:latin typeface="Karla"/>
+                <a:latin typeface="Calibri"/>
               </a:rPr>
               <a:t>10 / 27</a:t>
             </a:r>
@@ -4690,7 +4690,7 @@
                 <a:solidFill>
                   <a:srgbClr val="974F16"/>
                 </a:solidFill>
-                <a:latin typeface="Karla"/>
+                <a:latin typeface="Calibri"/>
               </a:rPr>
               <a:t>THE FORM TIME QUIZ  ·  ROUND TWO  ·  QUESTION 8 OF 10</a:t>
             </a:r>
@@ -4866,7 +4866,7 @@
                 <a:solidFill>
                   <a:srgbClr val="FFFDF7"/>
                 </a:solidFill>
-                <a:latin typeface="Karla"/>
+                <a:latin typeface="Calibri"/>
               </a:rPr>
               <a:t>8</a:t>
             </a:r>
@@ -4904,11 +4904,11 @@
               </a:spcAft>
             </a:pPr>
             <a:r>
-              <a:rPr sz="2400" b="1" i="0">
+              <a:rPr sz="2400" b="0" i="0">
                 <a:solidFill>
                   <a:srgbClr val="974F16"/>
                 </a:solidFill>
-                <a:latin typeface="Libre Caslon Display"/>
+                <a:latin typeface="Georgia"/>
               </a:rPr>
               <a:t>In which year did people first walk on the Moon?</a:t>
             </a:r>
@@ -4994,7 +4994,7 @@
                 <a:solidFill>
                   <a:srgbClr val="8B9179"/>
                 </a:solidFill>
-                <a:latin typeface="Karla"/>
+                <a:latin typeface="Calibri"/>
               </a:rPr>
               <a:t>Agree it as a team, then write it on the sheet.</a:t>
             </a:r>
@@ -5060,7 +5060,7 @@
                 <a:solidFill>
                   <a:srgbClr val="8B9179"/>
                 </a:solidFill>
-                <a:latin typeface="Karla"/>
+                <a:latin typeface="Calibri"/>
               </a:rPr>
               <a:t>The Pastoral Guide</a:t>
             </a:r>
@@ -5102,7 +5102,7 @@
                 <a:solidFill>
                   <a:srgbClr val="8B9179"/>
                 </a:solidFill>
-                <a:latin typeface="Karla"/>
+                <a:latin typeface="Calibri"/>
               </a:rPr>
               <a:t>11 / 27</a:t>
             </a:r>
@@ -5206,7 +5206,7 @@
                 <a:solidFill>
                   <a:srgbClr val="974F16"/>
                 </a:solidFill>
-                <a:latin typeface="Karla"/>
+                <a:latin typeface="Calibri"/>
               </a:rPr>
               <a:t>THE FORM TIME QUIZ  ·  ROUND TWO  ·  QUESTION 9 OF 10</a:t>
             </a:r>
@@ -5382,7 +5382,7 @@
                 <a:solidFill>
                   <a:srgbClr val="FFFDF7"/>
                 </a:solidFill>
-                <a:latin typeface="Karla"/>
+                <a:latin typeface="Calibri"/>
               </a:rPr>
               <a:t>9</a:t>
             </a:r>
@@ -5420,11 +5420,11 @@
               </a:spcAft>
             </a:pPr>
             <a:r>
-              <a:rPr sz="2400" b="1" i="0">
+              <a:rPr sz="2400" b="0" i="0">
                 <a:solidFill>
                   <a:srgbClr val="974F16"/>
                 </a:solidFill>
-                <a:latin typeface="Libre Caslon Display"/>
+                <a:latin typeface="Georgia"/>
               </a:rPr>
               <a:t>What is the smallest prime number?</a:t>
             </a:r>
@@ -5466,7 +5466,7 @@
                 <a:solidFill>
                   <a:srgbClr val="8B9179"/>
                 </a:solidFill>
-                <a:latin typeface="Karla"/>
+                <a:latin typeface="Calibri"/>
               </a:rPr>
               <a:t>ONE OF THESE</a:t>
             </a:r>
@@ -5642,7 +5642,7 @@
                 <a:solidFill>
                   <a:srgbClr val="FFFDF7"/>
                 </a:solidFill>
-                <a:latin typeface="Karla"/>
+                <a:latin typeface="Calibri"/>
               </a:rPr>
               <a:t>A</a:t>
             </a:r>
@@ -5684,7 +5684,7 @@
                 <a:solidFill>
                   <a:srgbClr val="2E3436"/>
                 </a:solidFill>
-                <a:latin typeface="Karla"/>
+                <a:latin typeface="Calibri"/>
               </a:rPr>
               <a:t>0</a:t>
             </a:r>
@@ -5860,7 +5860,7 @@
                 <a:solidFill>
                   <a:srgbClr val="FFFDF7"/>
                 </a:solidFill>
-                <a:latin typeface="Karla"/>
+                <a:latin typeface="Calibri"/>
               </a:rPr>
               <a:t>B</a:t>
             </a:r>
@@ -5902,7 +5902,7 @@
                 <a:solidFill>
                   <a:srgbClr val="2E3436"/>
                 </a:solidFill>
-                <a:latin typeface="Karla"/>
+                <a:latin typeface="Calibri"/>
               </a:rPr>
               <a:t>1</a:t>
             </a:r>
@@ -6078,7 +6078,7 @@
                 <a:solidFill>
                   <a:srgbClr val="FFFDF7"/>
                 </a:solidFill>
-                <a:latin typeface="Karla"/>
+                <a:latin typeface="Calibri"/>
               </a:rPr>
               <a:t>C</a:t>
             </a:r>
@@ -6120,7 +6120,7 @@
                 <a:solidFill>
                   <a:srgbClr val="2E3436"/>
                 </a:solidFill>
-                <a:latin typeface="Karla"/>
+                <a:latin typeface="Calibri"/>
               </a:rPr>
               <a:t>2</a:t>
             </a:r>
@@ -6162,7 +6162,7 @@
                 <a:solidFill>
                   <a:srgbClr val="5C6552"/>
                 </a:solidFill>
-                <a:latin typeface="Karla"/>
+                <a:latin typeface="Calibri"/>
               </a:rPr>
               <a:t>Agree it as a team, then tick it on the sheet.</a:t>
             </a:r>
@@ -6228,7 +6228,7 @@
                 <a:solidFill>
                   <a:srgbClr val="8B9179"/>
                 </a:solidFill>
-                <a:latin typeface="Karla"/>
+                <a:latin typeface="Calibri"/>
               </a:rPr>
               <a:t>The Pastoral Guide</a:t>
             </a:r>
@@ -6270,7 +6270,7 @@
                 <a:solidFill>
                   <a:srgbClr val="8B9179"/>
                 </a:solidFill>
-                <a:latin typeface="Karla"/>
+                <a:latin typeface="Calibri"/>
               </a:rPr>
               <a:t>12 / 27</a:t>
             </a:r>
@@ -6374,7 +6374,7 @@
                 <a:solidFill>
                   <a:srgbClr val="974F16"/>
                 </a:solidFill>
-                <a:latin typeface="Karla"/>
+                <a:latin typeface="Calibri"/>
               </a:rPr>
               <a:t>THE FORM TIME QUIZ  ·  ROUND TWO  ·  QUESTION 10 OF 10</a:t>
             </a:r>
@@ -6550,7 +6550,7 @@
                 <a:solidFill>
                   <a:srgbClr val="FFFDF7"/>
                 </a:solidFill>
-                <a:latin typeface="Karla"/>
+                <a:latin typeface="Calibri"/>
               </a:rPr>
               <a:t>10</a:t>
             </a:r>
@@ -6588,11 +6588,11 @@
               </a:spcAft>
             </a:pPr>
             <a:r>
-              <a:rPr sz="2400" b="1" i="0">
+              <a:rPr sz="2400" b="0" i="0">
                 <a:solidFill>
                   <a:srgbClr val="974F16"/>
                 </a:solidFill>
-                <a:latin typeface="Libre Caslon Display"/>
+                <a:latin typeface="Georgia"/>
               </a:rPr>
               <a:t>Which country’s flag has a green cedar tree in the middle?</a:t>
             </a:r>
@@ -6678,7 +6678,7 @@
                 <a:solidFill>
                   <a:srgbClr val="8B9179"/>
                 </a:solidFill>
-                <a:latin typeface="Karla"/>
+                <a:latin typeface="Calibri"/>
               </a:rPr>
               <a:t>Agree it as a team, then write it on the sheet.</a:t>
             </a:r>
@@ -6744,7 +6744,7 @@
                 <a:solidFill>
                   <a:srgbClr val="8B9179"/>
                 </a:solidFill>
-                <a:latin typeface="Karla"/>
+                <a:latin typeface="Calibri"/>
               </a:rPr>
               <a:t>The Pastoral Guide</a:t>
             </a:r>
@@ -6786,7 +6786,7 @@
                 <a:solidFill>
                   <a:srgbClr val="8B9179"/>
                 </a:solidFill>
-                <a:latin typeface="Karla"/>
+                <a:latin typeface="Calibri"/>
               </a:rPr>
               <a:t>13 / 27</a:t>
             </a:r>
@@ -6903,7 +6903,7 @@
                 <a:solidFill>
                   <a:srgbClr val="974F16"/>
                 </a:solidFill>
-                <a:latin typeface="Karla"/>
+                <a:latin typeface="Calibri"/>
               </a:rPr>
               <a:t>ANSWERS</a:t>
             </a:r>
@@ -6941,11 +6941,11 @@
               </a:spcAft>
             </a:pPr>
             <a:r>
-              <a:rPr sz="4000" b="1" i="0">
+              <a:rPr sz="4000" b="0" i="0">
                 <a:solidFill>
                   <a:srgbClr val="FFFDF7"/>
                 </a:solidFill>
-                <a:latin typeface="Libre Caslon Display"/>
+                <a:latin typeface="Georgia"/>
               </a:rPr>
               <a:t>Swap sheets</a:t>
             </a:r>
@@ -7031,7 +7031,7 @@
                 <a:solidFill>
                   <a:srgbClr val="EBCDAE"/>
                 </a:solidFill>
-                <a:latin typeface="Karla"/>
+                <a:latin typeface="Calibri"/>
               </a:rPr>
               <a:t>Swap with the team next to you. Give one mark for each right answer, then add up the score out of ten.</a:t>
             </a:r>
@@ -7097,7 +7097,7 @@
                 <a:solidFill>
                   <a:srgbClr val="EBCDAE"/>
                 </a:solidFill>
-                <a:latin typeface="Karla"/>
+                <a:latin typeface="Calibri"/>
               </a:rPr>
               <a:t>The Pastoral Guide</a:t>
             </a:r>
@@ -7139,7 +7139,7 @@
                 <a:solidFill>
                   <a:srgbClr val="EBCDAE"/>
                 </a:solidFill>
-                <a:latin typeface="Karla"/>
+                <a:latin typeface="Calibri"/>
               </a:rPr>
               <a:t>14 / 27</a:t>
             </a:r>
@@ -7243,7 +7243,7 @@
                 <a:solidFill>
                   <a:srgbClr val="974F16"/>
                 </a:solidFill>
-                <a:latin typeface="Karla"/>
+                <a:latin typeface="Calibri"/>
               </a:rPr>
               <a:t>THE FORM TIME QUIZ  ·  ANSWERS  ·  QUESTION 1</a:t>
             </a:r>
@@ -7285,7 +7285,7 @@
                 <a:solidFill>
                   <a:srgbClr val="5C6552"/>
                 </a:solidFill>
-                <a:latin typeface="Karla"/>
+                <a:latin typeface="Calibri"/>
               </a:rPr>
               <a:t>On a payslip, what does gross pay mean?</a:t>
             </a:r>
@@ -7323,11 +7323,11 @@
               </a:spcAft>
             </a:pPr>
             <a:r>
-              <a:rPr sz="3400" b="1" i="0">
+              <a:rPr sz="3400" b="0" i="0">
                 <a:solidFill>
                   <a:srgbClr val="974F16"/>
                 </a:solidFill>
-                <a:latin typeface="Libre Caslon Display"/>
+                <a:latin typeface="Georgia"/>
               </a:rPr>
               <a:t>B.  Your pay before tax</a:t>
             </a:r>
@@ -7459,7 +7459,7 @@
                 <a:solidFill>
                   <a:srgbClr val="2E3436"/>
                 </a:solidFill>
-                <a:latin typeface="Karla"/>
+                <a:latin typeface="Calibri"/>
               </a:rPr>
               <a:t>Gross is the full amount before tax and anything else is taken off. What actually lands in your account is net pay, and it is usually less.</a:t>
             </a:r>
@@ -7525,7 +7525,7 @@
                 <a:solidFill>
                   <a:srgbClr val="8B9179"/>
                 </a:solidFill>
-                <a:latin typeface="Karla"/>
+                <a:latin typeface="Calibri"/>
               </a:rPr>
               <a:t>The Pastoral Guide</a:t>
             </a:r>
@@ -7567,7 +7567,7 @@
                 <a:solidFill>
                   <a:srgbClr val="8B9179"/>
                 </a:solidFill>
-                <a:latin typeface="Karla"/>
+                <a:latin typeface="Calibri"/>
               </a:rPr>
               <a:t>15 / 27</a:t>
             </a:r>
@@ -7671,7 +7671,7 @@
                 <a:solidFill>
                   <a:srgbClr val="974F16"/>
                 </a:solidFill>
-                <a:latin typeface="Karla"/>
+                <a:latin typeface="Calibri"/>
               </a:rPr>
               <a:t>THE FORM TIME QUIZ  ·  ANSWERS  ·  QUESTION 2</a:t>
             </a:r>
@@ -7713,7 +7713,7 @@
                 <a:solidFill>
                   <a:srgbClr val="5C6552"/>
                 </a:solidFill>
-                <a:latin typeface="Karla"/>
+                <a:latin typeface="Calibri"/>
               </a:rPr>
               <a:t>Most free trials stop on their own when the trial ends.</a:t>
             </a:r>
@@ -7751,11 +7751,11 @@
               </a:spcAft>
             </a:pPr>
             <a:r>
-              <a:rPr sz="3400" b="1" i="0">
+              <a:rPr sz="3400" b="0" i="0">
                 <a:solidFill>
                   <a:srgbClr val="974F16"/>
                 </a:solidFill>
-                <a:latin typeface="Libre Caslon Display"/>
+                <a:latin typeface="Georgia"/>
               </a:rPr>
               <a:t>Myth</a:t>
             </a:r>
@@ -7887,7 +7887,7 @@
                 <a:solidFill>
                   <a:srgbClr val="2E3436"/>
                 </a:solidFill>
-                <a:latin typeface="Karla"/>
+                <a:latin typeface="Calibri"/>
               </a:rPr>
               <a:t>Most roll straight into a paid subscription unless you cancel. Put a reminder in your calendar on the day you sign up.</a:t>
             </a:r>
@@ -7953,7 +7953,7 @@
                 <a:solidFill>
                   <a:srgbClr val="8B9179"/>
                 </a:solidFill>
-                <a:latin typeface="Karla"/>
+                <a:latin typeface="Calibri"/>
               </a:rPr>
               <a:t>The Pastoral Guide</a:t>
             </a:r>
@@ -7995,7 +7995,7 @@
                 <a:solidFill>
                   <a:srgbClr val="8B9179"/>
                 </a:solidFill>
-                <a:latin typeface="Karla"/>
+                <a:latin typeface="Calibri"/>
               </a:rPr>
               <a:t>16 / 27</a:t>
             </a:r>
@@ -8099,7 +8099,7 @@
                 <a:solidFill>
                   <a:srgbClr val="974F16"/>
                 </a:solidFill>
-                <a:latin typeface="Karla"/>
+                <a:latin typeface="Calibri"/>
               </a:rPr>
               <a:t>THE FORM TIME QUIZ  ·  ANSWERS  ·  QUESTION 3</a:t>
             </a:r>
@@ -8141,7 +8141,7 @@
                 <a:solidFill>
                   <a:srgbClr val="5C6552"/>
                 </a:solidFill>
-                <a:latin typeface="Karla"/>
+                <a:latin typeface="Calibri"/>
               </a:rPr>
               <a:t>You should get the deposit on a rented flat back when you move out, as long as you leave it in good condition.</a:t>
             </a:r>
@@ -8179,11 +8179,11 @@
               </a:spcAft>
             </a:pPr>
             <a:r>
-              <a:rPr sz="3400" b="1" i="0">
+              <a:rPr sz="3400" b="0" i="0">
                 <a:solidFill>
                   <a:srgbClr val="974F16"/>
                 </a:solidFill>
-                <a:latin typeface="Libre Caslon Display"/>
+                <a:latin typeface="Georgia"/>
               </a:rPr>
               <a:t>Fact</a:t>
             </a:r>
@@ -8315,7 +8315,7 @@
                 <a:solidFill>
                   <a:srgbClr val="2E3436"/>
                 </a:solidFill>
-                <a:latin typeface="Karla"/>
+                <a:latin typeface="Calibri"/>
               </a:rPr>
               <a:t>Take dated photos of every room on the day you move in. They are your evidence if there is a disagreement about damage later.</a:t>
             </a:r>
@@ -8381,7 +8381,7 @@
                 <a:solidFill>
                   <a:srgbClr val="8B9179"/>
                 </a:solidFill>
-                <a:latin typeface="Karla"/>
+                <a:latin typeface="Calibri"/>
               </a:rPr>
               <a:t>The Pastoral Guide</a:t>
             </a:r>
@@ -8423,7 +8423,7 @@
                 <a:solidFill>
                   <a:srgbClr val="8B9179"/>
                 </a:solidFill>
-                <a:latin typeface="Karla"/>
+                <a:latin typeface="Calibri"/>
               </a:rPr>
               <a:t>17 / 27</a:t>
             </a:r>
@@ -8527,7 +8527,7 @@
                 <a:solidFill>
                   <a:srgbClr val="974F16"/>
                 </a:solidFill>
-                <a:latin typeface="Karla"/>
+                <a:latin typeface="Calibri"/>
               </a:rPr>
               <a:t>THE FORM TIME QUIZ  ·  ANSWERS  ·  QUESTION 4</a:t>
             </a:r>
@@ -8569,7 +8569,7 @@
                 <a:solidFill>
                   <a:srgbClr val="5C6552"/>
                 </a:solidFill>
-                <a:latin typeface="Karla"/>
+                <a:latin typeface="Calibri"/>
               </a:rPr>
               <a:t>Your bank might text you asking you to confirm your PIN.</a:t>
             </a:r>
@@ -8607,11 +8607,11 @@
               </a:spcAft>
             </a:pPr>
             <a:r>
-              <a:rPr sz="3400" b="1" i="0">
+              <a:rPr sz="3400" b="0" i="0">
                 <a:solidFill>
                   <a:srgbClr val="974F16"/>
                 </a:solidFill>
-                <a:latin typeface="Libre Caslon Display"/>
+                <a:latin typeface="Georgia"/>
               </a:rPr>
               <a:t>Myth</a:t>
             </a:r>
@@ -8743,7 +8743,7 @@
                 <a:solidFill>
                   <a:srgbClr val="2E3436"/>
                 </a:solidFill>
-                <a:latin typeface="Karla"/>
+                <a:latin typeface="Calibri"/>
               </a:rPr>
               <a:t>A real bank will never ask for your full PIN or password by text, email or phone. A message that does is a scam, however real it looks.</a:t>
             </a:r>
@@ -8809,7 +8809,7 @@
                 <a:solidFill>
                   <a:srgbClr val="8B9179"/>
                 </a:solidFill>
-                <a:latin typeface="Karla"/>
+                <a:latin typeface="Calibri"/>
               </a:rPr>
               <a:t>The Pastoral Guide</a:t>
             </a:r>
@@ -8851,7 +8851,7 @@
                 <a:solidFill>
                   <a:srgbClr val="8B9179"/>
                 </a:solidFill>
-                <a:latin typeface="Karla"/>
+                <a:latin typeface="Calibri"/>
               </a:rPr>
               <a:t>18 / 27</a:t>
             </a:r>
@@ -8955,7 +8955,7 @@
                 <a:solidFill>
                   <a:srgbClr val="974F16"/>
                 </a:solidFill>
-                <a:latin typeface="Karla"/>
+                <a:latin typeface="Calibri"/>
               </a:rPr>
               <a:t>THE FORM TIME QUIZ  ·  ANSWERS  ·  QUESTION 5</a:t>
             </a:r>
@@ -8997,7 +8997,7 @@
                 <a:solidFill>
                   <a:srgbClr val="5C6552"/>
                 </a:solidFill>
-                <a:latin typeface="Karla"/>
+                <a:latin typeface="Calibri"/>
               </a:rPr>
               <a:t>Paying the minimum on a credit card each month clears the debt fairly quickly.</a:t>
             </a:r>
@@ -9035,11 +9035,11 @@
               </a:spcAft>
             </a:pPr>
             <a:r>
-              <a:rPr sz="3400" b="1" i="0">
+              <a:rPr sz="3400" b="0" i="0">
                 <a:solidFill>
                   <a:srgbClr val="974F16"/>
                 </a:solidFill>
-                <a:latin typeface="Libre Caslon Display"/>
+                <a:latin typeface="Georgia"/>
               </a:rPr>
               <a:t>Myth</a:t>
             </a:r>
@@ -9171,7 +9171,7 @@
                 <a:solidFill>
                   <a:srgbClr val="2E3436"/>
                 </a:solidFill>
-                <a:latin typeface="Karla"/>
+                <a:latin typeface="Calibri"/>
               </a:rPr>
               <a:t>The minimum payment barely covers the interest, so the debt can take years to clear and cost a lot more than you borrowed.</a:t>
             </a:r>
@@ -9237,7 +9237,7 @@
                 <a:solidFill>
                   <a:srgbClr val="8B9179"/>
                 </a:solidFill>
-                <a:latin typeface="Karla"/>
+                <a:latin typeface="Calibri"/>
               </a:rPr>
               <a:t>The Pastoral Guide</a:t>
             </a:r>
@@ -9279,7 +9279,7 @@
                 <a:solidFill>
                   <a:srgbClr val="8B9179"/>
                 </a:solidFill>
-                <a:latin typeface="Karla"/>
+                <a:latin typeface="Calibri"/>
               </a:rPr>
               <a:t>19 / 27</a:t>
             </a:r>
@@ -9396,7 +9396,7 @@
                 <a:solidFill>
                   <a:srgbClr val="974F16"/>
                 </a:solidFill>
-                <a:latin typeface="Karla"/>
+                <a:latin typeface="Calibri"/>
               </a:rPr>
               <a:t>ROUND ONE</a:t>
             </a:r>
@@ -9434,11 +9434,11 @@
               </a:spcAft>
             </a:pPr>
             <a:r>
-              <a:rPr sz="4000" b="1" i="0">
+              <a:rPr sz="4000" b="0" i="0">
                 <a:solidFill>
                   <a:srgbClr val="FFFDF7"/>
                 </a:solidFill>
-                <a:latin typeface="Libre Caslon Display"/>
+                <a:latin typeface="Georgia"/>
               </a:rPr>
               <a:t>Adult life admin</a:t>
             </a:r>
@@ -9524,7 +9524,7 @@
                 <a:solidFill>
                   <a:srgbClr val="EBCDAE"/>
                 </a:solidFill>
-                <a:latin typeface="Karla"/>
+                <a:latin typeface="Calibri"/>
               </a:rPr>
               <a:t>Six questions. Some are fact or myth, and some give you three options to choose from.</a:t>
             </a:r>
@@ -9590,7 +9590,7 @@
                 <a:solidFill>
                   <a:srgbClr val="EBCDAE"/>
                 </a:solidFill>
-                <a:latin typeface="Karla"/>
+                <a:latin typeface="Calibri"/>
               </a:rPr>
               <a:t>The Pastoral Guide</a:t>
             </a:r>
@@ -9632,7 +9632,7 @@
                 <a:solidFill>
                   <a:srgbClr val="EBCDAE"/>
                 </a:solidFill>
-                <a:latin typeface="Karla"/>
+                <a:latin typeface="Calibri"/>
               </a:rPr>
               <a:t>2 / 27</a:t>
             </a:r>
@@ -9736,7 +9736,7 @@
                 <a:solidFill>
                   <a:srgbClr val="974F16"/>
                 </a:solidFill>
-                <a:latin typeface="Karla"/>
+                <a:latin typeface="Calibri"/>
               </a:rPr>
               <a:t>THE FORM TIME QUIZ  ·  ANSWERS  ·  QUESTION 6</a:t>
             </a:r>
@@ -9778,7 +9778,7 @@
                 <a:solidFill>
                   <a:srgbClr val="5C6552"/>
                 </a:solidFill>
-                <a:latin typeface="Karla"/>
+                <a:latin typeface="Calibri"/>
               </a:rPr>
               <a:t>What does the APR on a loan or a credit card tell you?</a:t>
             </a:r>
@@ -9816,11 +9816,11 @@
               </a:spcAft>
             </a:pPr>
             <a:r>
-              <a:rPr sz="2800" b="1" i="0">
+              <a:rPr sz="2800" b="0" i="0">
                 <a:solidFill>
                   <a:srgbClr val="974F16"/>
                 </a:solidFill>
-                <a:latin typeface="Libre Caslon Display"/>
+                <a:latin typeface="Georgia"/>
               </a:rPr>
               <a:t>A.  The yearly cost of borrowing</a:t>
             </a:r>
@@ -9952,7 +9952,7 @@
                 <a:solidFill>
                   <a:srgbClr val="2E3436"/>
                 </a:solidFill>
-                <a:latin typeface="Karla"/>
+                <a:latin typeface="Calibri"/>
               </a:rPr>
               <a:t>APR stands for annual percentage rate. The higher it is, the more the borrowing costs you, so it is the number to compare before you sign anything.</a:t>
             </a:r>
@@ -10018,7 +10018,7 @@
                 <a:solidFill>
                   <a:srgbClr val="8B9179"/>
                 </a:solidFill>
-                <a:latin typeface="Karla"/>
+                <a:latin typeface="Calibri"/>
               </a:rPr>
               <a:t>The Pastoral Guide</a:t>
             </a:r>
@@ -10060,7 +10060,7 @@
                 <a:solidFill>
                   <a:srgbClr val="8B9179"/>
                 </a:solidFill>
-                <a:latin typeface="Karla"/>
+                <a:latin typeface="Calibri"/>
               </a:rPr>
               <a:t>20 / 27</a:t>
             </a:r>
@@ -10164,7 +10164,7 @@
                 <a:solidFill>
                   <a:srgbClr val="974F16"/>
                 </a:solidFill>
-                <a:latin typeface="Karla"/>
+                <a:latin typeface="Calibri"/>
               </a:rPr>
               <a:t>THE FORM TIME QUIZ  ·  ANSWERS  ·  QUESTION 7</a:t>
             </a:r>
@@ -10206,7 +10206,7 @@
                 <a:solidFill>
                   <a:srgbClr val="5C6552"/>
                 </a:solidFill>
-                <a:latin typeface="Karla"/>
+                <a:latin typeface="Calibri"/>
               </a:rPr>
               <a:t>What is the capital city of Australia?</a:t>
             </a:r>
@@ -10244,11 +10244,11 @@
               </a:spcAft>
             </a:pPr>
             <a:r>
-              <a:rPr sz="3400" b="1" i="0">
+              <a:rPr sz="3400" b="0" i="0">
                 <a:solidFill>
                   <a:srgbClr val="974F16"/>
                 </a:solidFill>
-                <a:latin typeface="Libre Caslon Display"/>
+                <a:latin typeface="Georgia"/>
               </a:rPr>
               <a:t>Canberra</a:t>
             </a:r>
@@ -10380,7 +10380,7 @@
                 <a:solidFill>
                   <a:srgbClr val="2E3436"/>
                 </a:solidFill>
-                <a:latin typeface="Karla"/>
+                <a:latin typeface="Calibri"/>
               </a:rPr>
               <a:t>Not Sydney. Canberra was built to be the capital as a compromise between Sydney and Melbourne.</a:t>
             </a:r>
@@ -10446,7 +10446,7 @@
                 <a:solidFill>
                   <a:srgbClr val="8B9179"/>
                 </a:solidFill>
-                <a:latin typeface="Karla"/>
+                <a:latin typeface="Calibri"/>
               </a:rPr>
               <a:t>The Pastoral Guide</a:t>
             </a:r>
@@ -10488,7 +10488,7 @@
                 <a:solidFill>
                   <a:srgbClr val="8B9179"/>
                 </a:solidFill>
-                <a:latin typeface="Karla"/>
+                <a:latin typeface="Calibri"/>
               </a:rPr>
               <a:t>21 / 27</a:t>
             </a:r>
@@ -10592,7 +10592,7 @@
                 <a:solidFill>
                   <a:srgbClr val="974F16"/>
                 </a:solidFill>
-                <a:latin typeface="Karla"/>
+                <a:latin typeface="Calibri"/>
               </a:rPr>
               <a:t>THE FORM TIME QUIZ  ·  ANSWERS  ·  QUESTION 8</a:t>
             </a:r>
@@ -10634,7 +10634,7 @@
                 <a:solidFill>
                   <a:srgbClr val="5C6552"/>
                 </a:solidFill>
-                <a:latin typeface="Karla"/>
+                <a:latin typeface="Calibri"/>
               </a:rPr>
               <a:t>In which year did people first walk on the Moon?</a:t>
             </a:r>
@@ -10672,11 +10672,11 @@
               </a:spcAft>
             </a:pPr>
             <a:r>
-              <a:rPr sz="3400" b="1" i="0">
+              <a:rPr sz="3400" b="0" i="0">
                 <a:solidFill>
                   <a:srgbClr val="974F16"/>
                 </a:solidFill>
-                <a:latin typeface="Libre Caslon Display"/>
+                <a:latin typeface="Georgia"/>
               </a:rPr>
               <a:t>1969</a:t>
             </a:r>
@@ -10808,7 +10808,7 @@
                 <a:solidFill>
                   <a:srgbClr val="2E3436"/>
                 </a:solidFill>
-                <a:latin typeface="Karla"/>
+                <a:latin typeface="Calibri"/>
               </a:rPr>
               <a:t>Neil Armstrong and Buzz Aldrin, on the Apollo 11 mission, in July 1969.</a:t>
             </a:r>
@@ -10874,7 +10874,7 @@
                 <a:solidFill>
                   <a:srgbClr val="8B9179"/>
                 </a:solidFill>
-                <a:latin typeface="Karla"/>
+                <a:latin typeface="Calibri"/>
               </a:rPr>
               <a:t>The Pastoral Guide</a:t>
             </a:r>
@@ -10916,7 +10916,7 @@
                 <a:solidFill>
                   <a:srgbClr val="8B9179"/>
                 </a:solidFill>
-                <a:latin typeface="Karla"/>
+                <a:latin typeface="Calibri"/>
               </a:rPr>
               <a:t>22 / 27</a:t>
             </a:r>
@@ -11020,7 +11020,7 @@
                 <a:solidFill>
                   <a:srgbClr val="974F16"/>
                 </a:solidFill>
-                <a:latin typeface="Karla"/>
+                <a:latin typeface="Calibri"/>
               </a:rPr>
               <a:t>THE FORM TIME QUIZ  ·  ANSWERS  ·  QUESTION 9</a:t>
             </a:r>
@@ -11062,7 +11062,7 @@
                 <a:solidFill>
                   <a:srgbClr val="5C6552"/>
                 </a:solidFill>
-                <a:latin typeface="Karla"/>
+                <a:latin typeface="Calibri"/>
               </a:rPr>
               <a:t>What is the smallest prime number?</a:t>
             </a:r>
@@ -11100,11 +11100,11 @@
               </a:spcAft>
             </a:pPr>
             <a:r>
-              <a:rPr sz="3400" b="1" i="0">
+              <a:rPr sz="3400" b="0" i="0">
                 <a:solidFill>
                   <a:srgbClr val="974F16"/>
                 </a:solidFill>
-                <a:latin typeface="Libre Caslon Display"/>
+                <a:latin typeface="Georgia"/>
               </a:rPr>
               <a:t>C.  2</a:t>
             </a:r>
@@ -11236,7 +11236,7 @@
                 <a:solidFill>
                   <a:srgbClr val="2E3436"/>
                 </a:solidFill>
-                <a:latin typeface="Karla"/>
+                <a:latin typeface="Calibri"/>
               </a:rPr>
               <a:t>A prime has exactly two factors, one and itself. One has only one factor, so it does not count, and two is the only even prime.</a:t>
             </a:r>
@@ -11302,7 +11302,7 @@
                 <a:solidFill>
                   <a:srgbClr val="8B9179"/>
                 </a:solidFill>
-                <a:latin typeface="Karla"/>
+                <a:latin typeface="Calibri"/>
               </a:rPr>
               <a:t>The Pastoral Guide</a:t>
             </a:r>
@@ -11344,7 +11344,7 @@
                 <a:solidFill>
                   <a:srgbClr val="8B9179"/>
                 </a:solidFill>
-                <a:latin typeface="Karla"/>
+                <a:latin typeface="Calibri"/>
               </a:rPr>
               <a:t>23 / 27</a:t>
             </a:r>
@@ -11448,7 +11448,7 @@
                 <a:solidFill>
                   <a:srgbClr val="974F16"/>
                 </a:solidFill>
-                <a:latin typeface="Karla"/>
+                <a:latin typeface="Calibri"/>
               </a:rPr>
               <a:t>THE FORM TIME QUIZ  ·  ANSWERS  ·  QUESTION 10</a:t>
             </a:r>
@@ -11490,7 +11490,7 @@
                 <a:solidFill>
                   <a:srgbClr val="5C6552"/>
                 </a:solidFill>
-                <a:latin typeface="Karla"/>
+                <a:latin typeface="Calibri"/>
               </a:rPr>
               <a:t>Which country’s flag has a green cedar tree in the middle?</a:t>
             </a:r>
@@ -11528,11 +11528,11 @@
               </a:spcAft>
             </a:pPr>
             <a:r>
-              <a:rPr sz="3400" b="1" i="0">
+              <a:rPr sz="3400" b="0" i="0">
                 <a:solidFill>
                   <a:srgbClr val="974F16"/>
                 </a:solidFill>
-                <a:latin typeface="Libre Caslon Display"/>
+                <a:latin typeface="Georgia"/>
               </a:rPr>
               <a:t>Lebanon</a:t>
             </a:r>
@@ -11664,7 +11664,7 @@
                 <a:solidFill>
                   <a:srgbClr val="2E3436"/>
                 </a:solidFill>
-                <a:latin typeface="Karla"/>
+                <a:latin typeface="Calibri"/>
               </a:rPr>
               <a:t>The cedar has been a symbol of Lebanon for thousands of years and is mentioned in some of the oldest writing in the world.</a:t>
             </a:r>
@@ -11730,7 +11730,7 @@
                 <a:solidFill>
                   <a:srgbClr val="8B9179"/>
                 </a:solidFill>
-                <a:latin typeface="Karla"/>
+                <a:latin typeface="Calibri"/>
               </a:rPr>
               <a:t>The Pastoral Guide</a:t>
             </a:r>
@@ -11772,7 +11772,7 @@
                 <a:solidFill>
                   <a:srgbClr val="8B9179"/>
                 </a:solidFill>
-                <a:latin typeface="Karla"/>
+                <a:latin typeface="Calibri"/>
               </a:rPr>
               <a:t>24 / 27</a:t>
             </a:r>
@@ -11876,7 +11876,7 @@
                 <a:solidFill>
                   <a:srgbClr val="974F16"/>
                 </a:solidFill>
-                <a:latin typeface="Karla"/>
+                <a:latin typeface="Calibri"/>
               </a:rPr>
               <a:t>THE FORM TIME QUIZ  ·  VOLUME ONE</a:t>
             </a:r>
@@ -11938,11 +11938,11 @@
               </a:spcAft>
             </a:pPr>
             <a:r>
-              <a:rPr sz="3200" b="1" i="0">
+              <a:rPr sz="3200" b="0" i="0">
                 <a:solidFill>
                   <a:srgbClr val="974F16"/>
                 </a:solidFill>
-                <a:latin typeface="Libre Caslon Display"/>
+                <a:latin typeface="Georgia"/>
               </a:rPr>
               <a:t>Scores back to their owners</a:t>
             </a:r>
@@ -11984,7 +11984,7 @@
                 <a:solidFill>
                   <a:srgbClr val="5C6552"/>
                 </a:solidFill>
-                <a:latin typeface="Karla"/>
+                <a:latin typeface="Calibri"/>
               </a:rPr>
               <a:t>Hands up if you got ten. Then hands up if one of the answers surprised you, and tell us which.</a:t>
             </a:r>
@@ -12026,7 +12026,7 @@
                 <a:solidFill>
                   <a:srgbClr val="8B9179"/>
                 </a:solidFill>
-                <a:latin typeface="Karla"/>
+                <a:latin typeface="Calibri"/>
               </a:rPr>
               <a:t>Volume Two is available now at thepastoralguide.com.</a:t>
             </a:r>
@@ -12092,7 +12092,7 @@
                 <a:solidFill>
                   <a:srgbClr val="8B9179"/>
                 </a:solidFill>
-                <a:latin typeface="Karla"/>
+                <a:latin typeface="Calibri"/>
               </a:rPr>
               <a:t>The Pastoral Guide</a:t>
             </a:r>
@@ -12134,7 +12134,7 @@
                 <a:solidFill>
                   <a:srgbClr val="8B9179"/>
                 </a:solidFill>
-                <a:latin typeface="Karla"/>
+                <a:latin typeface="Calibri"/>
               </a:rPr>
               <a:t>25 / 27</a:t>
             </a:r>
@@ -12251,7 +12251,7 @@
                 <a:solidFill>
                   <a:srgbClr val="974F16"/>
                 </a:solidFill>
-                <a:latin typeface="Karla"/>
+                <a:latin typeface="Calibri"/>
               </a:rPr>
               <a:t>FOR THE TEACHER  ·  ADD YOUR OWN</a:t>
             </a:r>
@@ -12427,7 +12427,7 @@
                 <a:solidFill>
                   <a:srgbClr val="FFFDF7"/>
                 </a:solidFill>
-                <a:latin typeface="Karla"/>
+                <a:latin typeface="Calibri"/>
               </a:rPr>
               <a:t>?</a:t>
             </a:r>
@@ -12465,11 +12465,11 @@
               </a:spcAft>
             </a:pPr>
             <a:r>
-              <a:rPr sz="2400" b="1" i="0">
+              <a:rPr sz="2400" b="0" i="0">
                 <a:solidFill>
                   <a:srgbClr val="974F16"/>
                 </a:solidFill>
-                <a:latin typeface="Libre Caslon Display"/>
+                <a:latin typeface="Georgia"/>
               </a:rPr>
               <a:t>[ Type your own question here ]</a:t>
             </a:r>
@@ -12511,7 +12511,7 @@
                 <a:solidFill>
                   <a:srgbClr val="5C6552"/>
                 </a:solidFill>
-                <a:latin typeface="Karla"/>
+                <a:latin typeface="Calibri"/>
               </a:rPr>
               <a:t>Add your own questions here: something from assembly, a date coming up, or a question about your own school.</a:t>
             </a:r>
@@ -12533,7 +12533,7 @@
                 <a:solidFill>
                   <a:srgbClr val="5C6552"/>
                 </a:solidFill>
-                <a:latin typeface="Karla"/>
+                <a:latin typeface="Calibri"/>
               </a:rPr>
               <a:t>Duplicate this slide for each one and drag it in after question 10. There are two spare rows on the answer sheet for them.</a:t>
             </a:r>
@@ -12599,7 +12599,7 @@
                 <a:solidFill>
                   <a:srgbClr val="8B9179"/>
                 </a:solidFill>
-                <a:latin typeface="Karla"/>
+                <a:latin typeface="Calibri"/>
               </a:rPr>
               <a:t>The Pastoral Guide</a:t>
             </a:r>
@@ -12641,7 +12641,7 @@
                 <a:solidFill>
                   <a:srgbClr val="8B9179"/>
                 </a:solidFill>
-                <a:latin typeface="Karla"/>
+                <a:latin typeface="Calibri"/>
               </a:rPr>
               <a:t>26 / 27</a:t>
             </a:r>
@@ -12758,7 +12758,7 @@
                 <a:solidFill>
                   <a:srgbClr val="974F16"/>
                 </a:solidFill>
-                <a:latin typeface="Karla"/>
+                <a:latin typeface="Calibri"/>
               </a:rPr>
               <a:t>FOR THE TEACHER  ·  ADD YOUR OWN</a:t>
             </a:r>
@@ -12800,7 +12800,7 @@
                 <a:solidFill>
                   <a:srgbClr val="5C6552"/>
                 </a:solidFill>
-                <a:latin typeface="Karla"/>
+                <a:latin typeface="Calibri"/>
               </a:rPr>
               <a:t>[ Your question again, so the room remembers it ]</a:t>
             </a:r>
@@ -12838,11 +12838,11 @@
               </a:spcAft>
             </a:pPr>
             <a:r>
-              <a:rPr sz="3400" b="1" i="0">
+              <a:rPr sz="3400" b="0" i="0">
                 <a:solidFill>
                   <a:srgbClr val="974F16"/>
                 </a:solidFill>
-                <a:latin typeface="Libre Caslon Display"/>
+                <a:latin typeface="Georgia"/>
               </a:rPr>
               <a:t>[ The answer ]</a:t>
             </a:r>
@@ -12974,7 +12974,7 @@
                 <a:solidFill>
                   <a:srgbClr val="2E3436"/>
                 </a:solidFill>
-                <a:latin typeface="Karla"/>
+                <a:latin typeface="Calibri"/>
               </a:rPr>
               <a:t>[ One line on why, if there is something worth knowing ]</a:t>
             </a:r>
@@ -13016,7 +13016,7 @@
                 <a:solidFill>
                   <a:srgbClr val="5C6552"/>
                 </a:solidFill>
-                <a:latin typeface="Karla"/>
+                <a:latin typeface="Calibri"/>
               </a:rPr>
               <a:t>Duplicate this slide for each of your own questions and drag it in after the answer to question 10.</a:t>
             </a:r>
@@ -13082,7 +13082,7 @@
                 <a:solidFill>
                   <a:srgbClr val="8B9179"/>
                 </a:solidFill>
-                <a:latin typeface="Karla"/>
+                <a:latin typeface="Calibri"/>
               </a:rPr>
               <a:t>The Pastoral Guide</a:t>
             </a:r>
@@ -13124,7 +13124,7 @@
                 <a:solidFill>
                   <a:srgbClr val="8B9179"/>
                 </a:solidFill>
-                <a:latin typeface="Karla"/>
+                <a:latin typeface="Calibri"/>
               </a:rPr>
               <a:t>27 / 27</a:t>
             </a:r>
@@ -13228,7 +13228,7 @@
                 <a:solidFill>
                   <a:srgbClr val="974F16"/>
                 </a:solidFill>
-                <a:latin typeface="Karla"/>
+                <a:latin typeface="Calibri"/>
               </a:rPr>
               <a:t>THE FORM TIME QUIZ  ·  ROUND ONE  ·  QUESTION 1 OF 10</a:t>
             </a:r>
@@ -13404,7 +13404,7 @@
                 <a:solidFill>
                   <a:srgbClr val="FFFDF7"/>
                 </a:solidFill>
-                <a:latin typeface="Karla"/>
+                <a:latin typeface="Calibri"/>
               </a:rPr>
               <a:t>1</a:t>
             </a:r>
@@ -13442,11 +13442,11 @@
               </a:spcAft>
             </a:pPr>
             <a:r>
-              <a:rPr sz="2400" b="1" i="0">
+              <a:rPr sz="2400" b="0" i="0">
                 <a:solidFill>
                   <a:srgbClr val="974F16"/>
                 </a:solidFill>
-                <a:latin typeface="Libre Caslon Display"/>
+                <a:latin typeface="Georgia"/>
               </a:rPr>
               <a:t>On a payslip, what does gross pay mean?</a:t>
             </a:r>
@@ -13488,7 +13488,7 @@
                 <a:solidFill>
                   <a:srgbClr val="8B9179"/>
                 </a:solidFill>
-                <a:latin typeface="Karla"/>
+                <a:latin typeface="Calibri"/>
               </a:rPr>
               <a:t>ONE OF THESE</a:t>
             </a:r>
@@ -13664,7 +13664,7 @@
                 <a:solidFill>
                   <a:srgbClr val="FFFDF7"/>
                 </a:solidFill>
-                <a:latin typeface="Karla"/>
+                <a:latin typeface="Calibri"/>
               </a:rPr>
               <a:t>A</a:t>
             </a:r>
@@ -13706,7 +13706,7 @@
                 <a:solidFill>
                   <a:srgbClr val="2E3436"/>
                 </a:solidFill>
-                <a:latin typeface="Karla"/>
+                <a:latin typeface="Calibri"/>
               </a:rPr>
               <a:t>Your pay after tax</a:t>
             </a:r>
@@ -13882,7 +13882,7 @@
                 <a:solidFill>
                   <a:srgbClr val="FFFDF7"/>
                 </a:solidFill>
-                <a:latin typeface="Karla"/>
+                <a:latin typeface="Calibri"/>
               </a:rPr>
               <a:t>B</a:t>
             </a:r>
@@ -13924,7 +13924,7 @@
                 <a:solidFill>
                   <a:srgbClr val="2E3436"/>
                 </a:solidFill>
-                <a:latin typeface="Karla"/>
+                <a:latin typeface="Calibri"/>
               </a:rPr>
               <a:t>Your pay before tax</a:t>
             </a:r>
@@ -14100,7 +14100,7 @@
                 <a:solidFill>
                   <a:srgbClr val="FFFDF7"/>
                 </a:solidFill>
-                <a:latin typeface="Karla"/>
+                <a:latin typeface="Calibri"/>
               </a:rPr>
               <a:t>C</a:t>
             </a:r>
@@ -14142,7 +14142,7 @@
                 <a:solidFill>
                   <a:srgbClr val="2E3436"/>
                 </a:solidFill>
-                <a:latin typeface="Karla"/>
+                <a:latin typeface="Calibri"/>
               </a:rPr>
               <a:t>Your pay plus bonuses</a:t>
             </a:r>
@@ -14184,7 +14184,7 @@
                 <a:solidFill>
                   <a:srgbClr val="5C6552"/>
                 </a:solidFill>
-                <a:latin typeface="Karla"/>
+                <a:latin typeface="Calibri"/>
               </a:rPr>
               <a:t>Agree it as a team, then tick it on the sheet.</a:t>
             </a:r>
@@ -14250,7 +14250,7 @@
                 <a:solidFill>
                   <a:srgbClr val="8B9179"/>
                 </a:solidFill>
-                <a:latin typeface="Karla"/>
+                <a:latin typeface="Calibri"/>
               </a:rPr>
               <a:t>The Pastoral Guide</a:t>
             </a:r>
@@ -14292,7 +14292,7 @@
                 <a:solidFill>
                   <a:srgbClr val="8B9179"/>
                 </a:solidFill>
-                <a:latin typeface="Karla"/>
+                <a:latin typeface="Calibri"/>
               </a:rPr>
               <a:t>3 / 27</a:t>
             </a:r>
@@ -14396,7 +14396,7 @@
                 <a:solidFill>
                   <a:srgbClr val="974F16"/>
                 </a:solidFill>
-                <a:latin typeface="Karla"/>
+                <a:latin typeface="Calibri"/>
               </a:rPr>
               <a:t>THE FORM TIME QUIZ  ·  ROUND ONE  ·  QUESTION 2 OF 10</a:t>
             </a:r>
@@ -14572,7 +14572,7 @@
                 <a:solidFill>
                   <a:srgbClr val="FFFDF7"/>
                 </a:solidFill>
-                <a:latin typeface="Karla"/>
+                <a:latin typeface="Calibri"/>
               </a:rPr>
               <a:t>2</a:t>
             </a:r>
@@ -14610,11 +14610,11 @@
               </a:spcAft>
             </a:pPr>
             <a:r>
-              <a:rPr sz="2400" b="1" i="0">
+              <a:rPr sz="2400" b="0" i="0">
                 <a:solidFill>
                   <a:srgbClr val="974F16"/>
                 </a:solidFill>
-                <a:latin typeface="Libre Caslon Display"/>
+                <a:latin typeface="Georgia"/>
               </a:rPr>
               <a:t>Most free trials stop on their own when the trial ends.</a:t>
             </a:r>
@@ -14656,7 +14656,7 @@
                 <a:solidFill>
                   <a:srgbClr val="8B9179"/>
                 </a:solidFill>
-                <a:latin typeface="Karla"/>
+                <a:latin typeface="Calibri"/>
               </a:rPr>
               <a:t>FACT OR MYTH?</a:t>
             </a:r>
@@ -14784,11 +14784,11 @@
               </a:spcAft>
             </a:pPr>
             <a:r>
-              <a:rPr sz="2000" b="1" i="0">
+              <a:rPr sz="2000" b="0" i="0">
                 <a:solidFill>
                   <a:srgbClr val="974F16"/>
                 </a:solidFill>
-                <a:latin typeface="Libre Caslon Display"/>
+                <a:latin typeface="Georgia"/>
               </a:rPr>
               <a:t>Fact</a:t>
             </a:r>
@@ -14916,11 +14916,11 @@
               </a:spcAft>
             </a:pPr>
             <a:r>
-              <a:rPr sz="2000" b="1" i="0">
+              <a:rPr sz="2000" b="0" i="0">
                 <a:solidFill>
                   <a:srgbClr val="974F16"/>
                 </a:solidFill>
-                <a:latin typeface="Libre Caslon Display"/>
+                <a:latin typeface="Georgia"/>
               </a:rPr>
               <a:t>Myth</a:t>
             </a:r>
@@ -14962,7 +14962,7 @@
                 <a:solidFill>
                   <a:srgbClr val="5C6552"/>
                 </a:solidFill>
-                <a:latin typeface="Karla"/>
+                <a:latin typeface="Calibri"/>
               </a:rPr>
               <a:t>Agree it as a team, then tick it on the sheet.</a:t>
             </a:r>
@@ -15028,7 +15028,7 @@
                 <a:solidFill>
                   <a:srgbClr val="8B9179"/>
                 </a:solidFill>
-                <a:latin typeface="Karla"/>
+                <a:latin typeface="Calibri"/>
               </a:rPr>
               <a:t>The Pastoral Guide</a:t>
             </a:r>
@@ -15070,7 +15070,7 @@
                 <a:solidFill>
                   <a:srgbClr val="8B9179"/>
                 </a:solidFill>
-                <a:latin typeface="Karla"/>
+                <a:latin typeface="Calibri"/>
               </a:rPr>
               <a:t>4 / 27</a:t>
             </a:r>
@@ -15174,7 +15174,7 @@
                 <a:solidFill>
                   <a:srgbClr val="974F16"/>
                 </a:solidFill>
-                <a:latin typeface="Karla"/>
+                <a:latin typeface="Calibri"/>
               </a:rPr>
               <a:t>THE FORM TIME QUIZ  ·  ROUND ONE  ·  QUESTION 3 OF 10</a:t>
             </a:r>
@@ -15350,7 +15350,7 @@
                 <a:solidFill>
                   <a:srgbClr val="FFFDF7"/>
                 </a:solidFill>
-                <a:latin typeface="Karla"/>
+                <a:latin typeface="Calibri"/>
               </a:rPr>
               <a:t>3</a:t>
             </a:r>
@@ -15388,11 +15388,11 @@
               </a:spcAft>
             </a:pPr>
             <a:r>
-              <a:rPr sz="2100" b="1" i="0">
+              <a:rPr sz="2100" b="0" i="0">
                 <a:solidFill>
                   <a:srgbClr val="974F16"/>
                 </a:solidFill>
-                <a:latin typeface="Libre Caslon Display"/>
+                <a:latin typeface="Georgia"/>
               </a:rPr>
               <a:t>You should get the deposit on a rented flat back when you move out, as long as you leave it in good condition.</a:t>
             </a:r>
@@ -15434,7 +15434,7 @@
                 <a:solidFill>
                   <a:srgbClr val="8B9179"/>
                 </a:solidFill>
-                <a:latin typeface="Karla"/>
+                <a:latin typeface="Calibri"/>
               </a:rPr>
               <a:t>FACT OR MYTH?</a:t>
             </a:r>
@@ -15562,11 +15562,11 @@
               </a:spcAft>
             </a:pPr>
             <a:r>
-              <a:rPr sz="2000" b="1" i="0">
+              <a:rPr sz="2000" b="0" i="0">
                 <a:solidFill>
                   <a:srgbClr val="974F16"/>
                 </a:solidFill>
-                <a:latin typeface="Libre Caslon Display"/>
+                <a:latin typeface="Georgia"/>
               </a:rPr>
               <a:t>Fact</a:t>
             </a:r>
@@ -15694,11 +15694,11 @@
               </a:spcAft>
             </a:pPr>
             <a:r>
-              <a:rPr sz="2000" b="1" i="0">
+              <a:rPr sz="2000" b="0" i="0">
                 <a:solidFill>
                   <a:srgbClr val="974F16"/>
                 </a:solidFill>
-                <a:latin typeface="Libre Caslon Display"/>
+                <a:latin typeface="Georgia"/>
               </a:rPr>
               <a:t>Myth</a:t>
             </a:r>
@@ -15740,7 +15740,7 @@
                 <a:solidFill>
                   <a:srgbClr val="5C6552"/>
                 </a:solidFill>
-                <a:latin typeface="Karla"/>
+                <a:latin typeface="Calibri"/>
               </a:rPr>
               <a:t>Agree it as a team, then tick it on the sheet.</a:t>
             </a:r>
@@ -15806,7 +15806,7 @@
                 <a:solidFill>
                   <a:srgbClr val="8B9179"/>
                 </a:solidFill>
-                <a:latin typeface="Karla"/>
+                <a:latin typeface="Calibri"/>
               </a:rPr>
               <a:t>The Pastoral Guide</a:t>
             </a:r>
@@ -15848,7 +15848,7 @@
                 <a:solidFill>
                   <a:srgbClr val="8B9179"/>
                 </a:solidFill>
-                <a:latin typeface="Karla"/>
+                <a:latin typeface="Calibri"/>
               </a:rPr>
               <a:t>5 / 27</a:t>
             </a:r>
@@ -15952,7 +15952,7 @@
                 <a:solidFill>
                   <a:srgbClr val="974F16"/>
                 </a:solidFill>
-                <a:latin typeface="Karla"/>
+                <a:latin typeface="Calibri"/>
               </a:rPr>
               <a:t>THE FORM TIME QUIZ  ·  ROUND ONE  ·  QUESTION 4 OF 10</a:t>
             </a:r>
@@ -16128,7 +16128,7 @@
                 <a:solidFill>
                   <a:srgbClr val="FFFDF7"/>
                 </a:solidFill>
-                <a:latin typeface="Karla"/>
+                <a:latin typeface="Calibri"/>
               </a:rPr>
               <a:t>4</a:t>
             </a:r>
@@ -16166,11 +16166,11 @@
               </a:spcAft>
             </a:pPr>
             <a:r>
-              <a:rPr sz="2400" b="1" i="0">
+              <a:rPr sz="2400" b="0" i="0">
                 <a:solidFill>
                   <a:srgbClr val="974F16"/>
                 </a:solidFill>
-                <a:latin typeface="Libre Caslon Display"/>
+                <a:latin typeface="Georgia"/>
               </a:rPr>
               <a:t>Your bank might text you asking you to confirm your PIN.</a:t>
             </a:r>
@@ -16212,7 +16212,7 @@
                 <a:solidFill>
                   <a:srgbClr val="8B9179"/>
                 </a:solidFill>
-                <a:latin typeface="Karla"/>
+                <a:latin typeface="Calibri"/>
               </a:rPr>
               <a:t>FACT OR MYTH?</a:t>
             </a:r>
@@ -16340,11 +16340,11 @@
               </a:spcAft>
             </a:pPr>
             <a:r>
-              <a:rPr sz="2000" b="1" i="0">
+              <a:rPr sz="2000" b="0" i="0">
                 <a:solidFill>
                   <a:srgbClr val="974F16"/>
                 </a:solidFill>
-                <a:latin typeface="Libre Caslon Display"/>
+                <a:latin typeface="Georgia"/>
               </a:rPr>
               <a:t>Fact</a:t>
             </a:r>
@@ -16472,11 +16472,11 @@
               </a:spcAft>
             </a:pPr>
             <a:r>
-              <a:rPr sz="2000" b="1" i="0">
+              <a:rPr sz="2000" b="0" i="0">
                 <a:solidFill>
                   <a:srgbClr val="974F16"/>
                 </a:solidFill>
-                <a:latin typeface="Libre Caslon Display"/>
+                <a:latin typeface="Georgia"/>
               </a:rPr>
               <a:t>Myth</a:t>
             </a:r>
@@ -16518,7 +16518,7 @@
                 <a:solidFill>
                   <a:srgbClr val="5C6552"/>
                 </a:solidFill>
-                <a:latin typeface="Karla"/>
+                <a:latin typeface="Calibri"/>
               </a:rPr>
               <a:t>Agree it as a team, then tick it on the sheet.</a:t>
             </a:r>
@@ -16584,7 +16584,7 @@
                 <a:solidFill>
                   <a:srgbClr val="8B9179"/>
                 </a:solidFill>
-                <a:latin typeface="Karla"/>
+                <a:latin typeface="Calibri"/>
               </a:rPr>
               <a:t>The Pastoral Guide</a:t>
             </a:r>
@@ -16626,7 +16626,7 @@
                 <a:solidFill>
                   <a:srgbClr val="8B9179"/>
                 </a:solidFill>
-                <a:latin typeface="Karla"/>
+                <a:latin typeface="Calibri"/>
               </a:rPr>
               <a:t>6 / 27</a:t>
             </a:r>
@@ -16730,7 +16730,7 @@
                 <a:solidFill>
                   <a:srgbClr val="974F16"/>
                 </a:solidFill>
-                <a:latin typeface="Karla"/>
+                <a:latin typeface="Calibri"/>
               </a:rPr>
               <a:t>THE FORM TIME QUIZ  ·  ROUND ONE  ·  QUESTION 5 OF 10</a:t>
             </a:r>
@@ -16906,7 +16906,7 @@
                 <a:solidFill>
                   <a:srgbClr val="FFFDF7"/>
                 </a:solidFill>
-                <a:latin typeface="Karla"/>
+                <a:latin typeface="Calibri"/>
               </a:rPr>
               <a:t>5</a:t>
             </a:r>
@@ -16944,11 +16944,11 @@
               </a:spcAft>
             </a:pPr>
             <a:r>
-              <a:rPr sz="2400" b="1" i="0">
+              <a:rPr sz="2400" b="0" i="0">
                 <a:solidFill>
                   <a:srgbClr val="974F16"/>
                 </a:solidFill>
-                <a:latin typeface="Libre Caslon Display"/>
+                <a:latin typeface="Georgia"/>
               </a:rPr>
               <a:t>Paying the minimum on a credit card each month clears the debt fairly quickly.</a:t>
             </a:r>
@@ -16990,7 +16990,7 @@
                 <a:solidFill>
                   <a:srgbClr val="8B9179"/>
                 </a:solidFill>
-                <a:latin typeface="Karla"/>
+                <a:latin typeface="Calibri"/>
               </a:rPr>
               <a:t>FACT OR MYTH?</a:t>
             </a:r>
@@ -17118,11 +17118,11 @@
               </a:spcAft>
             </a:pPr>
             <a:r>
-              <a:rPr sz="2000" b="1" i="0">
+              <a:rPr sz="2000" b="0" i="0">
                 <a:solidFill>
                   <a:srgbClr val="974F16"/>
                 </a:solidFill>
-                <a:latin typeface="Libre Caslon Display"/>
+                <a:latin typeface="Georgia"/>
               </a:rPr>
               <a:t>Fact</a:t>
             </a:r>
@@ -17250,11 +17250,11 @@
               </a:spcAft>
             </a:pPr>
             <a:r>
-              <a:rPr sz="2000" b="1" i="0">
+              <a:rPr sz="2000" b="0" i="0">
                 <a:solidFill>
                   <a:srgbClr val="974F16"/>
                 </a:solidFill>
-                <a:latin typeface="Libre Caslon Display"/>
+                <a:latin typeface="Georgia"/>
               </a:rPr>
               <a:t>Myth</a:t>
             </a:r>
@@ -17296,7 +17296,7 @@
                 <a:solidFill>
                   <a:srgbClr val="5C6552"/>
                 </a:solidFill>
-                <a:latin typeface="Karla"/>
+                <a:latin typeface="Calibri"/>
               </a:rPr>
               <a:t>Agree it as a team, then tick it on the sheet.</a:t>
             </a:r>
@@ -17362,7 +17362,7 @@
                 <a:solidFill>
                   <a:srgbClr val="8B9179"/>
                 </a:solidFill>
-                <a:latin typeface="Karla"/>
+                <a:latin typeface="Calibri"/>
               </a:rPr>
               <a:t>The Pastoral Guide</a:t>
             </a:r>
@@ -17404,7 +17404,7 @@
                 <a:solidFill>
                   <a:srgbClr val="8B9179"/>
                 </a:solidFill>
-                <a:latin typeface="Karla"/>
+                <a:latin typeface="Calibri"/>
               </a:rPr>
               <a:t>7 / 27</a:t>
             </a:r>
@@ -17508,7 +17508,7 @@
                 <a:solidFill>
                   <a:srgbClr val="974F16"/>
                 </a:solidFill>
-                <a:latin typeface="Karla"/>
+                <a:latin typeface="Calibri"/>
               </a:rPr>
               <a:t>THE FORM TIME QUIZ  ·  ROUND ONE  ·  QUESTION 6 OF 10</a:t>
             </a:r>
@@ -17684,7 +17684,7 @@
                 <a:solidFill>
                   <a:srgbClr val="FFFDF7"/>
                 </a:solidFill>
-                <a:latin typeface="Karla"/>
+                <a:latin typeface="Calibri"/>
               </a:rPr>
               <a:t>6</a:t>
             </a:r>
@@ -17722,11 +17722,11 @@
               </a:spcAft>
             </a:pPr>
             <a:r>
-              <a:rPr sz="2400" b="1" i="0">
+              <a:rPr sz="2400" b="0" i="0">
                 <a:solidFill>
                   <a:srgbClr val="974F16"/>
                 </a:solidFill>
-                <a:latin typeface="Libre Caslon Display"/>
+                <a:latin typeface="Georgia"/>
               </a:rPr>
               <a:t>What does the APR on a loan or a credit card tell you?</a:t>
             </a:r>
@@ -17768,7 +17768,7 @@
                 <a:solidFill>
                   <a:srgbClr val="8B9179"/>
                 </a:solidFill>
-                <a:latin typeface="Karla"/>
+                <a:latin typeface="Calibri"/>
               </a:rPr>
               <a:t>ONE OF THESE</a:t>
             </a:r>
@@ -17944,7 +17944,7 @@
                 <a:solidFill>
                   <a:srgbClr val="FFFDF7"/>
                 </a:solidFill>
-                <a:latin typeface="Karla"/>
+                <a:latin typeface="Calibri"/>
               </a:rPr>
               <a:t>A</a:t>
             </a:r>
@@ -17986,7 +17986,7 @@
                 <a:solidFill>
                   <a:srgbClr val="2E3436"/>
                 </a:solidFill>
-                <a:latin typeface="Karla"/>
+                <a:latin typeface="Calibri"/>
               </a:rPr>
               <a:t>The yearly cost of borrowing</a:t>
             </a:r>
@@ -18162,7 +18162,7 @@
                 <a:solidFill>
                   <a:srgbClr val="FFFDF7"/>
                 </a:solidFill>
-                <a:latin typeface="Karla"/>
+                <a:latin typeface="Calibri"/>
               </a:rPr>
               <a:t>B</a:t>
             </a:r>
@@ -18204,7 +18204,7 @@
                 <a:solidFill>
                   <a:srgbClr val="2E3436"/>
                 </a:solidFill>
-                <a:latin typeface="Karla"/>
+                <a:latin typeface="Calibri"/>
               </a:rPr>
               <a:t>How much you can borrow</a:t>
             </a:r>
@@ -18380,7 +18380,7 @@
                 <a:solidFill>
                   <a:srgbClr val="FFFDF7"/>
                 </a:solidFill>
-                <a:latin typeface="Karla"/>
+                <a:latin typeface="Calibri"/>
               </a:rPr>
               <a:t>C</a:t>
             </a:r>
@@ -18422,7 +18422,7 @@
                 <a:solidFill>
                   <a:srgbClr val="2E3436"/>
                 </a:solidFill>
-                <a:latin typeface="Karla"/>
+                <a:latin typeface="Calibri"/>
               </a:rPr>
               <a:t>How long the loan lasts</a:t>
             </a:r>
@@ -18464,7 +18464,7 @@
                 <a:solidFill>
                   <a:srgbClr val="5C6552"/>
                 </a:solidFill>
-                <a:latin typeface="Karla"/>
+                <a:latin typeface="Calibri"/>
               </a:rPr>
               <a:t>Agree it as a team, then tick it on the sheet.</a:t>
             </a:r>
@@ -18530,7 +18530,7 @@
                 <a:solidFill>
                   <a:srgbClr val="8B9179"/>
                 </a:solidFill>
-                <a:latin typeface="Karla"/>
+                <a:latin typeface="Calibri"/>
               </a:rPr>
               <a:t>The Pastoral Guide</a:t>
             </a:r>
@@ -18572,7 +18572,7 @@
                 <a:solidFill>
                   <a:srgbClr val="8B9179"/>
                 </a:solidFill>
-                <a:latin typeface="Karla"/>
+                <a:latin typeface="Calibri"/>
               </a:rPr>
               <a:t>8 / 27</a:t>
             </a:r>
@@ -18689,7 +18689,7 @@
                 <a:solidFill>
                   <a:srgbClr val="974F16"/>
                 </a:solidFill>
-                <a:latin typeface="Karla"/>
+                <a:latin typeface="Calibri"/>
               </a:rPr>
               <a:t>ROUND TWO</a:t>
             </a:r>
@@ -18727,11 +18727,11 @@
               </a:spcAft>
             </a:pPr>
             <a:r>
-              <a:rPr sz="4000" b="1" i="0">
+              <a:rPr sz="4000" b="0" i="0">
                 <a:solidFill>
                   <a:srgbClr val="FFFDF7"/>
                 </a:solidFill>
-                <a:latin typeface="Libre Caslon Display"/>
+                <a:latin typeface="Georgia"/>
               </a:rPr>
               <a:t>General knowledge</a:t>
             </a:r>
@@ -18817,7 +18817,7 @@
                 <a:solidFill>
                   <a:srgbClr val="EBCDAE"/>
                 </a:solidFill>
-                <a:latin typeface="Karla"/>
+                <a:latin typeface="Calibri"/>
               </a:rPr>
               <a:t>Four questions to finish. Some have options, and some you will have to write out in full.</a:t>
             </a:r>
@@ -18883,7 +18883,7 @@
                 <a:solidFill>
                   <a:srgbClr val="EBCDAE"/>
                 </a:solidFill>
-                <a:latin typeface="Karla"/>
+                <a:latin typeface="Calibri"/>
               </a:rPr>
               <a:t>The Pastoral Guide</a:t>
             </a:r>
@@ -18925,7 +18925,7 @@
                 <a:solidFill>
                   <a:srgbClr val="EBCDAE"/>
                 </a:solidFill>
-                <a:latin typeface="Karla"/>
+                <a:latin typeface="Calibri"/>
               </a:rPr>
               <a:t>9 / 27</a:t>
             </a:r>
